--- a/Organske_supstance.pptx
+++ b/Organske_supstance.pptx
@@ -145,7 +145,7 @@
                 </a:solidFill>
                 <a:latin typeface="Calibri"/>
               </a:rPr>
-              <a:t>Koncentracija metana u vazduhu (ppb)</a:t>
+              <a:t>Концентрација метана у ваздуху (ppb)</a:t>
             </a:r>
           </a:p>
         </c:rich>
@@ -167,7 +167,7 @@
               <c:strCache>
                 <c:ptCount val="1"/>
                 <c:pt idx="0">
-                  <c:v>Metan (ppb)</c:v>
+                  <c:v>Метан (ppb)</c:v>
                 </c:pt>
               </c:strCache>
             </c:strRef>
@@ -464,7 +464,7 @@
                 </a:solidFill>
                 <a:latin typeface="Calibri"/>
               </a:rPr>
-              <a:t>Sadržaj humusa u tipovima zemljišta (%)</a:t>
+              <a:t>Садржај хумуса (%)</a:t>
             </a:r>
           </a:p>
         </c:rich>
@@ -488,7 +488,7 @@
               <c:strCache>
                 <c:ptCount val="1"/>
                 <c:pt idx="0">
-                  <c:v>Humus (%)</c:v>
+                  <c:v>Хумус (%)</c:v>
                 </c:pt>
               </c:strCache>
             </c:strRef>
@@ -586,19 +586,19 @@
                 <c:ptCount val="5"/>
                 <c:lvl>
                   <c:pt idx="0">
-                    <c:v>Černozem (Vojvodina)</c:v>
+                    <c:v>Чернозем (Војводина)</c:v>
                   </c:pt>
                   <c:pt idx="1">
-                    <c:v>Smonica</c:v>
+                    <c:v>Смоница</c:v>
                   </c:pt>
                   <c:pt idx="2">
-                    <c:v>Gajnjača</c:v>
+                    <c:v>Гајњача</c:v>
                   </c:pt>
                   <c:pt idx="3">
-                    <c:v>Podzol</c:v>
+                    <c:v>Подзол</c:v>
                   </c:pt>
                   <c:pt idx="4">
-                    <c:v>Peskovito tlo</c:v>
+                    <c:v>Песковито тло</c:v>
                   </c:pt>
                 </c:lvl>
               </c:multiLvlStrCache>
@@ -1170,7 +1170,7 @@
           <a:p>
             <a:r>
               <a:rPr lang="en-US" dirty="0"/>
-              <a:t>Uvod: organske supstance nisu samo u živim bićima. Postaviti pitanje publici gde misle da ih ima u neživoj prirodi.</a:t>
+              <a:t>Увод: органске супстанце нису само у живим бићима. Поставити питање публици где мисле да их има у неживој природи.</a:t>
             </a:r>
             <a:endParaRPr lang="en-US" dirty="0"/>
           </a:p>
@@ -1258,7 +1258,7 @@
           <a:p>
             <a:r>
               <a:rPr lang="en-US" dirty="0"/>
-              <a:t>Molekule u svemiru detektuju radio-teleskopi po spektru. Aminokiseline u meteoritima su racemske smeše — dokaz da nisu zemaljsko zagađenje.</a:t>
+              <a:t>Молекуле у свемиру детектују радио-телескопи по спектру. Аминокиселине у метеоритима су рацемске смеше — доказ да нису земаљско загађење.</a:t>
             </a:r>
             <a:endParaRPr lang="en-US" dirty="0"/>
           </a:p>
@@ -1346,7 +1346,7 @@
           <a:p>
             <a:r>
               <a:rPr lang="en-US" dirty="0"/>
-              <a:t>Do 1828. (Veler, sinteza uree) verovalo se da organske supstance može da stvori samo „životna sila“.</a:t>
+              <a:t>До 1828. (Велер, синтеза урее) веровало се да органске супстанце може да створи само „животна сила“.</a:t>
             </a:r>
             <a:endParaRPr lang="en-US" dirty="0"/>
           </a:p>
@@ -1434,7 +1434,7 @@
           <a:p>
             <a:r>
               <a:rPr lang="en-US" dirty="0"/>
-              <a:t>Sažetak značaja; povezati sa svakodnevnim životom.</a:t>
+              <a:t>Сажетак значаја; повезати са свакодневним животом.</a:t>
             </a:r>
             <a:endParaRPr lang="en-US" dirty="0"/>
           </a:p>
@@ -1522,7 +1522,7 @@
           <a:p>
             <a:r>
               <a:rPr lang="en-US" dirty="0"/>
-              <a:t>Kraj.</a:t>
+              <a:t>Крај.</a:t>
             </a:r>
             <a:endParaRPr lang="en-US" dirty="0"/>
           </a:p>
@@ -1610,7 +1610,7 @@
           <a:p>
             <a:r>
               <a:rPr lang="en-US" dirty="0"/>
-              <a:t>Definicija i granica organsko/neorgansko.</a:t>
+              <a:t>Дефиниција и граница органско/неорганско.</a:t>
             </a:r>
             <a:endParaRPr lang="en-US" dirty="0"/>
           </a:p>
@@ -1698,7 +1698,7 @@
           <a:p>
             <a:r>
               <a:rPr lang="en-US" dirty="0"/>
-              <a:t>Pregled strukture prezentacije: idemo redom kroz četiri sfere.</a:t>
+              <a:t>Преглед структуре презентације: идемо редом кроз четири сфере.</a:t>
             </a:r>
             <a:endParaRPr lang="en-US" dirty="0"/>
           </a:p>
@@ -1786,7 +1786,7 @@
           <a:p>
             <a:r>
               <a:rPr lang="en-US" dirty="0"/>
-              <a:t>Ključna ideja: organske supstance u neživoj prirodi su uglavnom poreklom iz nekadašnjih živih bića, ali ne sve (kosmos!).</a:t>
+              <a:t>Кључна идеја: органске супстанце у неживој природи су углавном пореклом из некадашњих живих бића, али не све (космос!).</a:t>
             </a:r>
             <a:endParaRPr lang="en-US" dirty="0"/>
           </a:p>
@@ -1874,7 +1874,7 @@
           <a:p>
             <a:r>
               <a:rPr lang="en-US" dirty="0"/>
-              <a:t>Izvori: NOAA, IPCC AR6 (približne vrednosti). Metan je porastao 2,6 puta od predindustrijskog doba.</a:t>
+              <a:t>Извори: NOAA, IPCC AR6 (приближне вредности). Метан је порастао 2,6 пута од прединдустријског доба.</a:t>
             </a:r>
             <a:endParaRPr lang="en-US" dirty="0"/>
           </a:p>
@@ -1962,7 +1962,7 @@
           <a:p>
             <a:r>
               <a:rPr lang="en-US" dirty="0"/>
-              <a:t>DOC ≈ 660–700 Gt C (Hansell i sar.). Natural seeps ≈ 45–50% nafte u okeanu (NRC, 2003).</a:t>
+              <a:t>DOC ≈ 660–700 Гт C (Ханселл и сар.). Натурал сеепс ≈ 45–50% нафте у океану (NRC, 2003).</a:t>
             </a:r>
             <a:endParaRPr lang="en-US" dirty="0"/>
           </a:p>
@@ -2050,7 +2050,7 @@
           <a:p>
             <a:r>
               <a:rPr lang="en-US" dirty="0"/>
-              <a:t>Vrednosti humusa su tipični rasponi za Srbiju (zaokruženo).</a:t>
+              <a:t>Вредности хумуса су типични распони за Србију (заокружено).</a:t>
             </a:r>
             <a:endParaRPr lang="en-US" dirty="0"/>
           </a:p>
@@ -2138,7 +2138,7 @@
           <a:p>
             <a:r>
               <a:rPr lang="en-US" dirty="0"/>
-              <a:t>Fosilna goriva su najveći koncentrat organskih supstanci u litosferi.</a:t>
+              <a:t>Фосилна горива су највећи концентрат органских супстанци у литосфери.</a:t>
             </a:r>
             <a:endParaRPr lang="en-US" dirty="0"/>
           </a:p>
@@ -2226,7 +2226,7 @@
           <a:p>
             <a:r>
               <a:rPr lang="en-US" dirty="0"/>
-              <a:t>Ovi materijali su mineraloidi — nemaju kristalnu strukturu, ali se nalaze u Zemljinoj kori kao i minerali.</a:t>
+              <a:t>Ови материјали су минералоиди — немају кристалну структуру, али се налазе у Земљиној кори као и минерали.</a:t>
             </a:r>
             <a:endParaRPr lang="en-US" dirty="0"/>
           </a:p>
@@ -2639,7 +2639,7 @@
                 <a:ea typeface="Calibri" pitchFamily="34" charset="-122"/>
                 <a:cs typeface="Calibri" pitchFamily="34" charset="-120"/>
               </a:rPr>
-              <a:t>Hemija  ·  Priroda</a:t>
+              <a:t>Хемија  ·  Природа</a:t>
             </a:r>
             <a:endParaRPr lang="en-US" sz="1300" dirty="0"/>
           </a:p>
@@ -2681,7 +2681,7 @@
                 <a:ea typeface="Century Schoolbook" pitchFamily="34" charset="-122"/>
                 <a:cs typeface="Century Schoolbook" pitchFamily="34" charset="-120"/>
               </a:rPr>
-              <a:t>Zastupljenost organskih supstanci u neživoj prirodi</a:t>
+              <a:t>Заступљеност органских супстанци у неживој природи</a:t>
             </a:r>
             <a:endParaRPr lang="en-US" sz="4400" dirty="0"/>
           </a:p>
@@ -2720,7 +2720,7 @@
                 <a:ea typeface="Calibri" pitchFamily="34" charset="-122"/>
                 <a:cs typeface="Calibri" pitchFamily="34" charset="-120"/>
               </a:rPr>
-              <a:t>Ugljenik je svuda — u vazduhu, vodi, stenama i svemiru. Gde se tačno kriju organske supstance izvan živih bića?</a:t>
+              <a:t>Угљеник је свуда — у ваздуху, води, стенама и свемиру. Где се тачно крију органске супстанце изван живих бића?</a:t>
             </a:r>
             <a:endParaRPr lang="en-US" sz="1500" dirty="0"/>
           </a:p>
@@ -2791,7 +2791,7 @@
                 <a:ea typeface="Century Schoolbook" pitchFamily="34" charset="-122"/>
                 <a:cs typeface="Century Schoolbook" pitchFamily="34" charset="-120"/>
               </a:rPr>
-              <a:t>Organske supstance u kosmosu</a:t>
+              <a:t>Органске супстанце у космосу</a:t>
             </a:r>
             <a:endParaRPr lang="en-US" sz="3000" dirty="0"/>
           </a:p>
@@ -2830,7 +2830,7 @@
                 <a:ea typeface="Calibri" pitchFamily="34" charset="-122"/>
                 <a:cs typeface="Calibri" pitchFamily="34" charset="-120"/>
               </a:rPr>
-              <a:t>Ugljenikova hemija nije zemaljska privilegija</a:t>
+              <a:t>Угљеникова хемија није земаљска привилегија</a:t>
             </a:r>
             <a:endParaRPr lang="en-US" sz="1300" dirty="0"/>
           </a:p>
@@ -2927,7 +2927,7 @@
               <a:buNone/>
             </a:pPr>
             <a:r>
-              <a:rPr lang="en-US" sz="1150" dirty="0">
+              <a:rPr lang="en-US" sz="1100" dirty="0">
                 <a:solidFill>
                   <a:srgbClr val="E8DFD2"/>
                 </a:solidFill>
@@ -2935,9 +2935,9 @@
                 <a:ea typeface="Calibri" pitchFamily="34" charset="-122"/>
                 <a:cs typeface="Calibri" pitchFamily="34" charset="-120"/>
               </a:rPr>
-              <a:t>organskih molekula otkriveno u međuzvezdanom prostoru — među njima metanol, formaldehid i etil-alkohol</a:t>
-            </a:r>
-            <a:endParaRPr lang="en-US" sz="1150" dirty="0"/>
+              <a:t>органских молекула откривено у међузвезданом простору — метанол, формалдехид, етанол…</a:t>
+            </a:r>
+            <a:endParaRPr lang="en-US" sz="1100" dirty="0"/>
           </a:p>
         </p:txBody>
       </p:sp>
@@ -3008,7 +3008,7 @@
               <a:buNone/>
             </a:pPr>
             <a:r>
-              <a:rPr lang="en-US" sz="1150" dirty="0">
+              <a:rPr lang="en-US" sz="1100" dirty="0">
                 <a:solidFill>
                   <a:srgbClr val="E8DFD2"/>
                 </a:solidFill>
@@ -3016,9 +3016,9 @@
                 <a:ea typeface="Calibri" pitchFamily="34" charset="-122"/>
                 <a:cs typeface="Calibri" pitchFamily="34" charset="-120"/>
               </a:rPr>
-              <a:t>meteorit Marčison pao u Australiji; u njemu je nađeno preko 70 aminokiselina — gradivnih blokova belančevina</a:t>
-            </a:r>
-            <a:endParaRPr lang="en-US" sz="1150" dirty="0"/>
+              <a:t>метеорит Марчисон пао у Аустралији — у њему је нађено преко 70 аминокиселина</a:t>
+            </a:r>
+            <a:endParaRPr lang="en-US" sz="1100" dirty="0"/>
           </a:p>
         </p:txBody>
       </p:sp>
@@ -3055,7 +3055,7 @@
                 <a:ea typeface="Century Schoolbook" pitchFamily="34" charset="-122"/>
                 <a:cs typeface="Century Schoolbook" pitchFamily="34" charset="-120"/>
               </a:rPr>
-              <a:t>Titan</a:t>
+              <a:t>Титан</a:t>
             </a:r>
             <a:endParaRPr lang="en-US" sz="2400" dirty="0"/>
           </a:p>
@@ -3089,7 +3089,7 @@
               <a:buNone/>
             </a:pPr>
             <a:r>
-              <a:rPr lang="en-US" sz="1150" dirty="0">
+              <a:rPr lang="en-US" sz="1100" dirty="0">
                 <a:solidFill>
                   <a:srgbClr val="E8DFD2"/>
                 </a:solidFill>
@@ -3097,9 +3097,9 @@
                 <a:ea typeface="Calibri" pitchFamily="34" charset="-122"/>
                 <a:cs typeface="Calibri" pitchFamily="34" charset="-120"/>
               </a:rPr>
-              <a:t>Saturnov mesec ima jezera i kišu od tečnog metana i etana</a:t>
-            </a:r>
-            <a:endParaRPr lang="en-US" sz="1150" dirty="0"/>
+              <a:t>Сатурнов месец има језера и кишу од течног метана и етана</a:t>
+            </a:r>
+            <a:endParaRPr lang="en-US" sz="1100" dirty="0"/>
           </a:p>
         </p:txBody>
       </p:sp>
@@ -3207,7 +3207,7 @@
                 <a:ea typeface="Century Schoolbook" pitchFamily="34" charset="-122"/>
                 <a:cs typeface="Century Schoolbook" pitchFamily="34" charset="-120"/>
               </a:rPr>
-              <a:t>Mogu li nastati bez života?</a:t>
+              <a:t>Могу ли настати без живота?</a:t>
             </a:r>
             <a:endParaRPr lang="en-US" sz="3000" dirty="0"/>
           </a:p>
@@ -3246,7 +3246,7 @@
                 <a:ea typeface="Calibri" pitchFamily="34" charset="-122"/>
                 <a:cs typeface="Calibri" pitchFamily="34" charset="-120"/>
               </a:rPr>
-              <a:t>Milerov eksperiment, 1953.</a:t>
+              <a:t>Милеров експеримент, 1953.</a:t>
             </a:r>
             <a:endParaRPr lang="en-US" sz="1300" dirty="0"/>
           </a:p>
@@ -3312,7 +3312,7 @@
                 <a:ea typeface="Calibri" pitchFamily="34" charset="-122"/>
                 <a:cs typeface="Calibri" pitchFamily="34" charset="-120"/>
               </a:rPr>
-              <a:t>Stenli Miler je u staklenoj aparaturi spojio „okean“ (vodu) i „atmosferu“ mlade Zemlje (metan, amonijak, vodonik), pa kroz smešu nedelju dana puštao električne varnice — veštačke munje.</a:t>
+              <a:t>Стенли Милер је у стакленој апаратури спојио „океан“ (воду) и „атмосферу“ младе Земље (метан, амонијак, водоник), па кроз смешу недељу дана пуштао електричне варнице — вештачке муње.</a:t>
             </a:r>
             <a:endParaRPr lang="en-US" sz="1400" dirty="0"/>
           </a:p>
@@ -3351,7 +3351,7 @@
                 <a:ea typeface="Century Schoolbook" pitchFamily="34" charset="-122"/>
                 <a:cs typeface="Century Schoolbook" pitchFamily="34" charset="-120"/>
               </a:rPr>
-              <a:t>Rezultat</a:t>
+              <a:t>Резултат</a:t>
             </a:r>
             <a:endParaRPr lang="en-US" sz="1500" dirty="0"/>
           </a:p>
@@ -3366,7 +3366,7 @@
         <p:spPr>
           <a:xfrm>
             <a:off x="4480560" y="3200400"/>
-            <a:ext cx="4114800" cy="1554480"/>
+            <a:ext cx="4114800" cy="1463040"/>
           </a:xfrm>
           <a:prstGeom prst="rect">
             <a:avLst/>
@@ -3386,7 +3386,7 @@
               <a:buChar char="–"/>
             </a:pPr>
             <a:r>
-              <a:rPr lang="en-US" sz="1250" dirty="0">
+              <a:rPr lang="en-US" sz="1200" dirty="0">
                 <a:solidFill>
                   <a:srgbClr val="2A2420"/>
                 </a:solidFill>
@@ -3394,9 +3394,9 @@
                 <a:ea typeface="Calibri" pitchFamily="34" charset="-122"/>
                 <a:cs typeface="Calibri" pitchFamily="34" charset="-120"/>
               </a:rPr>
-              <a:t>Voda je potamnela — nastalo je više od 20 aminokiselina i drugih organskih jedinjenja</a:t>
-            </a:r>
-            <a:endParaRPr lang="en-US" sz="1250" dirty="0"/>
+              <a:t>Вода је потамнела — настало је више од 20 аминокиселина и других органских једињења</a:t>
+            </a:r>
+            <a:endParaRPr lang="en-US" sz="1200" dirty="0"/>
           </a:p>
           <a:p>
             <a:pPr marL="342900" indent="-342900">
@@ -3407,7 +3407,7 @@
               <a:buChar char="–"/>
             </a:pPr>
             <a:r>
-              <a:rPr lang="en-US" sz="1250" dirty="0">
+              <a:rPr lang="en-US" sz="1200" dirty="0">
                 <a:solidFill>
                   <a:srgbClr val="2A2420"/>
                 </a:solidFill>
@@ -3415,9 +3415,9 @@
                 <a:ea typeface="Calibri" pitchFamily="34" charset="-122"/>
                 <a:cs typeface="Calibri" pitchFamily="34" charset="-120"/>
               </a:rPr>
-              <a:t>Dokaz da organske supstance nastaju i abiogeno, iz neorganskih</a:t>
-            </a:r>
-            <a:endParaRPr lang="en-US" sz="1250" dirty="0"/>
+              <a:t>Доказ да органске супстанце настају и абиогено, из неорганских</a:t>
+            </a:r>
+            <a:endParaRPr lang="en-US" sz="1200" dirty="0"/>
           </a:p>
           <a:p>
             <a:pPr marL="342900" indent="-342900">
@@ -3428,7 +3428,7 @@
               <a:buChar char="–"/>
             </a:pPr>
             <a:r>
-              <a:rPr lang="en-US" sz="1250" dirty="0">
+              <a:rPr lang="en-US" sz="1200" dirty="0">
                 <a:solidFill>
                   <a:srgbClr val="2A2420"/>
                 </a:solidFill>
@@ -3436,9 +3436,9 @@
                 <a:ea typeface="Calibri" pitchFamily="34" charset="-122"/>
                 <a:cs typeface="Calibri" pitchFamily="34" charset="-120"/>
               </a:rPr>
-              <a:t>Slični procesi se i danas odvijaju u vulkanima, hidrotermalnim izvorima i kosmosu</a:t>
-            </a:r>
-            <a:endParaRPr lang="en-US" sz="1250" dirty="0"/>
+              <a:t>Слични процеси се и данас одвијају у вулканима, хидротермалним изворима и космосу</a:t>
+            </a:r>
+            <a:endParaRPr lang="en-US" sz="1200" dirty="0"/>
           </a:p>
         </p:txBody>
       </p:sp>
@@ -3546,7 +3546,7 @@
                 <a:ea typeface="Century Schoolbook" pitchFamily="34" charset="-122"/>
                 <a:cs typeface="Century Schoolbook" pitchFamily="34" charset="-120"/>
               </a:rPr>
-              <a:t>Zašto je to važno?</a:t>
+              <a:t>Зашто је то важно?</a:t>
             </a:r>
             <a:endParaRPr lang="en-US" sz="3000" dirty="0"/>
           </a:p>
@@ -3649,7 +3649,7 @@
                 <a:ea typeface="Century Schoolbook" pitchFamily="34" charset="-122"/>
                 <a:cs typeface="Century Schoolbook" pitchFamily="34" charset="-120"/>
               </a:rPr>
-              <a:t>Energija</a:t>
+              <a:t>Енергија</a:t>
             </a:r>
             <a:endParaRPr lang="en-US" sz="1600" dirty="0"/>
           </a:p>
@@ -3691,7 +3691,7 @@
                 <a:ea typeface="Calibri" pitchFamily="34" charset="-122"/>
                 <a:cs typeface="Calibri" pitchFamily="34" charset="-120"/>
               </a:rPr>
-              <a:t>Nafta, ugalj i gas daju oko 80 % svetske energije — sve su to organske supstance iz neživе prirode.</a:t>
+              <a:t>Нафта, угаљ и гас дају око 80 % светске енергије — све су то органске супстанце из неживе природе.</a:t>
             </a:r>
             <a:endParaRPr lang="en-US" sz="1150" dirty="0"/>
           </a:p>
@@ -3794,7 +3794,7 @@
                 <a:ea typeface="Century Schoolbook" pitchFamily="34" charset="-122"/>
                 <a:cs typeface="Century Schoolbook" pitchFamily="34" charset="-120"/>
               </a:rPr>
-              <a:t>Plodnost tla</a:t>
+              <a:t>Плодност тла</a:t>
             </a:r>
             <a:endParaRPr lang="en-US" sz="1600" dirty="0"/>
           </a:p>
@@ -3836,7 +3836,7 @@
                 <a:ea typeface="Calibri" pitchFamily="34" charset="-122"/>
                 <a:cs typeface="Calibri" pitchFamily="34" charset="-120"/>
               </a:rPr>
-              <a:t>Bez humusa nema poljoprivrede. Jedan santimetar humusa nastaje oko 100 godina.</a:t>
+              <a:t>Без хумуса нема пољопривреде. Један сантиметар хумуса настаје око 100 година.</a:t>
             </a:r>
             <a:endParaRPr lang="en-US" sz="1150" dirty="0"/>
           </a:p>
@@ -3939,7 +3939,7 @@
                 <a:ea typeface="Century Schoolbook" pitchFamily="34" charset="-122"/>
                 <a:cs typeface="Century Schoolbook" pitchFamily="34" charset="-120"/>
               </a:rPr>
-              <a:t>Klima</a:t>
+              <a:t>Клима</a:t>
             </a:r>
             <a:endParaRPr lang="en-US" sz="1600" dirty="0"/>
           </a:p>
@@ -3981,7 +3981,7 @@
                 <a:ea typeface="Calibri" pitchFamily="34" charset="-122"/>
                 <a:cs typeface="Calibri" pitchFamily="34" charset="-120"/>
               </a:rPr>
-              <a:t>Metan i CO₂ iz zemljišta, močvara i permafrosta odlučuju o temperaturi planete.</a:t>
+              <a:t>Метан и CO₂ из земљишта, мочвара и пермафроста одлучују о температури планете.</a:t>
             </a:r>
             <a:endParaRPr lang="en-US" sz="1150" dirty="0"/>
           </a:p>
@@ -4084,7 +4084,7 @@
                 <a:ea typeface="Century Schoolbook" pitchFamily="34" charset="-122"/>
                 <a:cs typeface="Century Schoolbook" pitchFamily="34" charset="-120"/>
               </a:rPr>
-              <a:t>Poreklo života</a:t>
+              <a:t>Порекло живота</a:t>
             </a:r>
             <a:endParaRPr lang="en-US" sz="1600" dirty="0"/>
           </a:p>
@@ -4126,7 +4126,7 @@
                 <a:ea typeface="Calibri" pitchFamily="34" charset="-122"/>
                 <a:cs typeface="Calibri" pitchFamily="34" charset="-120"/>
               </a:rPr>
-              <a:t>Organske supstance iz kosmosa i mlade Zemlje su možda prvi koraci ka prvim ćelijama.</a:t>
+              <a:t>Органске супстанце из космоса и младе Земље су можда први кораци ка првим ћелијама.</a:t>
             </a:r>
             <a:endParaRPr lang="en-US" sz="1150" dirty="0"/>
           </a:p>
@@ -4243,7 +4243,7 @@
                 <a:ea typeface="Century Schoolbook" pitchFamily="34" charset="-122"/>
                 <a:cs typeface="Century Schoolbook" pitchFamily="34" charset="-120"/>
               </a:rPr>
-              <a:t>Hvala na pažnji</a:t>
+              <a:t>Хвала на пажњи</a:t>
             </a:r>
             <a:endParaRPr lang="en-US" sz="5400" dirty="0"/>
           </a:p>
@@ -4282,7 +4282,7 @@
                 <a:ea typeface="Calibri" pitchFamily="34" charset="-122"/>
                 <a:cs typeface="Calibri" pitchFamily="34" charset="-120"/>
               </a:rPr>
-              <a:t>Pitanja?</a:t>
+              <a:t>Питања?</a:t>
             </a:r>
             <a:endParaRPr lang="en-US" sz="2200" dirty="0"/>
           </a:p>
@@ -4321,7 +4321,7 @@
                 <a:ea typeface="Calibri" pitchFamily="34" charset="-122"/>
                 <a:cs typeface="Calibri" pitchFamily="34" charset="-120"/>
               </a:rPr>
-              <a:t>Zastupljenost organskih supstanci u neživoj prirodi</a:t>
+              <a:t>Заступљеност органских супстанци у неживој природи</a:t>
             </a:r>
             <a:endParaRPr lang="en-US" sz="1200" dirty="0"/>
           </a:p>
@@ -4392,7 +4392,7 @@
                 <a:ea typeface="Century Schoolbook" pitchFamily="34" charset="-122"/>
                 <a:cs typeface="Century Schoolbook" pitchFamily="34" charset="-120"/>
               </a:rPr>
-              <a:t>Šta su organske supstance?</a:t>
+              <a:t>Шта су органске супстанце?</a:t>
             </a:r>
             <a:endParaRPr lang="en-US" sz="3000" dirty="0"/>
           </a:p>
@@ -4434,7 +4434,7 @@
                 <a:ea typeface="Calibri" pitchFamily="34" charset="-122"/>
                 <a:cs typeface="Calibri" pitchFamily="34" charset="-120"/>
               </a:rPr>
-              <a:t>Organske supstance su jedinjenja ugljenika. Atomi ugljenika se vezuju u lance i prstenove, a za njih se vezuju vodonik, kiseonik, azot, sumpor i fosfor. Zato ih ima na milione — više nego svih neorganskih jedinjenja zajedno.</a:t>
+              <a:t>Органске супстанце су једињења угљеника. Атоми угљеника се везују у ланце и прстенове, а за њих се везују водоник, кисеоник, азот, сумпор и фосфор. Зато их има на милионе — више него свих неорганских једињења заједно.</a:t>
             </a:r>
             <a:endParaRPr lang="en-US" sz="1400" dirty="0"/>
           </a:p>
@@ -4473,7 +4473,7 @@
                 <a:ea typeface="Century Schoolbook" pitchFamily="34" charset="-122"/>
                 <a:cs typeface="Century Schoolbook" pitchFamily="34" charset="-120"/>
               </a:rPr>
-              <a:t>Izuzeci</a:t>
+              <a:t>Изузеци</a:t>
             </a:r>
             <a:endParaRPr lang="en-US" sz="1500" dirty="0"/>
           </a:p>
@@ -4515,7 +4515,7 @@
                 <a:ea typeface="Calibri" pitchFamily="34" charset="-122"/>
                 <a:cs typeface="Calibri" pitchFamily="34" charset="-120"/>
               </a:rPr>
-              <a:t>Neka jedinjenja ugljenika se ipak ubrajaju u neorganska: ugljen-dioksid (CO₂), ugljen-monoksid (CO), karbonati (krečnjak, CaCO₃) i karbidi. Ona jesu deo priče o ugljeniku, ali ne i organske supstance.</a:t>
+              <a:t>Нека једињења угљеника се ипак убрајају у неорганска: угљен-диоксид (CO₂), угљен-моноксид (CO), карбонати (кречњак, CaCO₃) и карбиди. Она јесу део приче о угљенику, али не и органске супстанце.</a:t>
             </a:r>
             <a:endParaRPr lang="en-US" sz="1250" dirty="0"/>
           </a:p>
@@ -4578,7 +4578,7 @@
                 <a:ea typeface="Calibri" pitchFamily="34" charset="-122"/>
                 <a:cs typeface="Calibri" pitchFamily="34" charset="-120"/>
               </a:rPr>
-              <a:t>Metan, CH₄ — najjednostavnija organska supstanca</a:t>
+              <a:t>Метан, CH₄ — најједноставнија органска супстанца</a:t>
             </a:r>
             <a:endParaRPr lang="en-US" sz="1100" dirty="0"/>
           </a:p>
@@ -4688,7 +4688,7 @@
                 <a:ea typeface="Century Schoolbook" pitchFamily="34" charset="-122"/>
                 <a:cs typeface="Century Schoolbook" pitchFamily="34" charset="-120"/>
               </a:rPr>
-              <a:t>Gde ih sve ima?</a:t>
+              <a:t>Где их све има?</a:t>
             </a:r>
             <a:endParaRPr lang="en-US" sz="3000" dirty="0"/>
           </a:p>
@@ -4727,7 +4727,7 @@
                 <a:ea typeface="Calibri" pitchFamily="34" charset="-122"/>
                 <a:cs typeface="Calibri" pitchFamily="34" charset="-120"/>
               </a:rPr>
-              <a:t>Četiri „adrese“ organskih supstanci izvan živih bića</a:t>
+              <a:t>Четири „адресе“ органских супстанци изван живих бића</a:t>
             </a:r>
             <a:endParaRPr lang="en-US" sz="1300" dirty="0"/>
           </a:p>
@@ -4829,7 +4829,7 @@
                 <a:ea typeface="Century Schoolbook" pitchFamily="34" charset="-122"/>
                 <a:cs typeface="Century Schoolbook" pitchFamily="34" charset="-120"/>
               </a:rPr>
-              <a:t>Atmosfera</a:t>
+              <a:t>Атмосфера</a:t>
             </a:r>
             <a:endParaRPr lang="en-US" sz="1600" dirty="0"/>
           </a:p>
@@ -4868,7 +4868,7 @@
                 <a:ea typeface="Calibri" pitchFamily="34" charset="-122"/>
                 <a:cs typeface="Calibri" pitchFamily="34" charset="-120"/>
               </a:rPr>
-              <a:t>metan, isparljiva organska jedinjenja, aerosoli</a:t>
+              <a:t>метан, испарљива органска једињења, аеросоли</a:t>
             </a:r>
             <a:endParaRPr lang="en-US" sz="1200" dirty="0"/>
           </a:p>
@@ -4946,7 +4946,7 @@
                 <a:ea typeface="Century Schoolbook" pitchFamily="34" charset="-122"/>
                 <a:cs typeface="Century Schoolbook" pitchFamily="34" charset="-120"/>
               </a:rPr>
-              <a:t>Hidrosfera</a:t>
+              <a:t>Хидросфера</a:t>
             </a:r>
             <a:endParaRPr lang="en-US" sz="1600" dirty="0"/>
           </a:p>
@@ -4985,7 +4985,7 @@
                 <a:ea typeface="Calibri" pitchFamily="34" charset="-122"/>
                 <a:cs typeface="Calibri" pitchFamily="34" charset="-120"/>
               </a:rPr>
-              <a:t>rastvoreni organski ugljenik, huminske supstance</a:t>
+              <a:t>растворени органски угљеник, хуминске супстанце</a:t>
             </a:r>
             <a:endParaRPr lang="en-US" sz="1200" dirty="0"/>
           </a:p>
@@ -5063,7 +5063,7 @@
                 <a:ea typeface="Century Schoolbook" pitchFamily="34" charset="-122"/>
                 <a:cs typeface="Century Schoolbook" pitchFamily="34" charset="-120"/>
               </a:rPr>
-              <a:t>Litosfera</a:t>
+              <a:t>Литосфера</a:t>
             </a:r>
             <a:endParaRPr lang="en-US" sz="1600" dirty="0"/>
           </a:p>
@@ -5102,7 +5102,7 @@
                 <a:ea typeface="Calibri" pitchFamily="34" charset="-122"/>
                 <a:cs typeface="Calibri" pitchFamily="34" charset="-120"/>
               </a:rPr>
-              <a:t>humus, treset, ugalj, nafta, gas, ćilibar</a:t>
+              <a:t>хумус, тресет, угаљ, нафта, гас, ћилибар</a:t>
             </a:r>
             <a:endParaRPr lang="en-US" sz="1200" dirty="0"/>
           </a:p>
@@ -5180,7 +5180,7 @@
                 <a:ea typeface="Century Schoolbook" pitchFamily="34" charset="-122"/>
                 <a:cs typeface="Century Schoolbook" pitchFamily="34" charset="-120"/>
               </a:rPr>
-              <a:t>Kosmos</a:t>
+              <a:t>Космос</a:t>
             </a:r>
             <a:endParaRPr lang="en-US" sz="1600" dirty="0"/>
           </a:p>
@@ -5219,7 +5219,7 @@
                 <a:ea typeface="Calibri" pitchFamily="34" charset="-122"/>
                 <a:cs typeface="Calibri" pitchFamily="34" charset="-120"/>
               </a:rPr>
-              <a:t>meteoriti, komete, međuzvezdani oblaci</a:t>
+              <a:t>метеорити, комете, међузвездани облаци</a:t>
             </a:r>
             <a:endParaRPr lang="en-US" sz="1200" dirty="0"/>
           </a:p>
@@ -5329,7 +5329,7 @@
                 <a:ea typeface="Century Schoolbook" pitchFamily="34" charset="-122"/>
                 <a:cs typeface="Century Schoolbook" pitchFamily="34" charset="-120"/>
               </a:rPr>
-              <a:t>Živa i neživa priroda su povezane</a:t>
+              <a:t>Кружење угљеника</a:t>
             </a:r>
             <a:endParaRPr lang="en-US" sz="3000" dirty="0"/>
           </a:p>
@@ -5368,7 +5368,7 @@
                 <a:ea typeface="Calibri" pitchFamily="34" charset="-122"/>
                 <a:cs typeface="Calibri" pitchFamily="34" charset="-120"/>
               </a:rPr>
-              <a:t>Kruženje ugljenika — organske supstance stalno prelaze iz jednog dela prirode u drugi</a:t>
+              <a:t>Жива и нежива природа су повезане кружењем органских супстанци</a:t>
             </a:r>
             <a:endParaRPr lang="en-US" sz="1300" dirty="0"/>
           </a:p>
@@ -5434,7 +5434,7 @@
                 <a:ea typeface="Calibri" pitchFamily="34" charset="-122"/>
                 <a:cs typeface="Calibri" pitchFamily="34" charset="-120"/>
               </a:rPr>
-              <a:t>Biljke fotosintezom vezuju CO₂ iz vazduha u organske supstance. Kada organizmi uginu, deo tih supstanci ostaje u zemljištu kao humus, deo tone na dno mora, a mali deo se milionima godina pretvara u naftu, ugalj i gas.</a:t>
+              <a:t>Биљке фотосинтезом везују CO₂ из ваздуха у органске супстанце. Када организми угину, део тих супстанци остаје у земљишту као хумус, део тоне на дно мора, а мали део се милионима година претвара у нафту, угаљ и гас.</a:t>
             </a:r>
             <a:endParaRPr lang="en-US" sz="1400" dirty="0"/>
           </a:p>
@@ -5476,7 +5476,7 @@
                 <a:ea typeface="Calibri" pitchFamily="34" charset="-122"/>
                 <a:cs typeface="Calibri" pitchFamily="34" charset="-120"/>
               </a:rPr>
-              <a:t>Tako organske supstance „iz života“ postaju deo neživе prirode — a truljenjem, sagorevanjem i vulkanima ugljenik se vraća u atmosferu.</a:t>
+              <a:t>Тако органске супстанце „из живота“ постају део неживе природе — а труљењем, сагоревањем и вулканима угљеник се враћа у атмосферу.</a:t>
             </a:r>
             <a:endParaRPr lang="en-US" sz="1300" dirty="0"/>
           </a:p>
@@ -5586,7 +5586,7 @@
                 <a:ea typeface="Century Schoolbook" pitchFamily="34" charset="-122"/>
                 <a:cs typeface="Century Schoolbook" pitchFamily="34" charset="-120"/>
               </a:rPr>
-              <a:t>Atmosfera</a:t>
+              <a:t>Атмосфера</a:t>
             </a:r>
             <a:endParaRPr lang="en-US" sz="3000" dirty="0"/>
           </a:p>
@@ -5625,7 +5625,7 @@
                 <a:ea typeface="Calibri" pitchFamily="34" charset="-122"/>
                 <a:cs typeface="Calibri" pitchFamily="34" charset="-120"/>
               </a:rPr>
-              <a:t>Malo po količini, veliko po uticaju</a:t>
+              <a:t>Мало по количини, велико по утицају</a:t>
             </a:r>
             <a:endParaRPr lang="en-US" sz="1300" dirty="0"/>
           </a:p>
@@ -5722,7 +5722,7 @@
                 <a:ea typeface="Calibri" pitchFamily="34" charset="-122"/>
                 <a:cs typeface="Calibri" pitchFamily="34" charset="-120"/>
               </a:rPr>
-              <a:t>Metan je glavna organska supstanca u vazduhu. Nastaje u močvarama, na pirinčanim poljima, u stomacima preživara i curenjem iz gasovoda. Ima ga samo 0,0002 %, ali kao gas staklene bašte greje 80 puta jače od CO₂.</a:t>
+              <a:t>Метан је главна органска супстанца у ваздуху. Настаје у мочварама, на пиринчаним пољима, у стомацима преживара и цурењем из гасовода. Има га само 0,0002 %, али као гас стаклене баште греје 80 пута јаче од CO₂.</a:t>
             </a:r>
             <a:endParaRPr lang="en-US" sz="1250" dirty="0"/>
           </a:p>
@@ -5761,7 +5761,7 @@
                 <a:ea typeface="Century Schoolbook" pitchFamily="34" charset="-122"/>
                 <a:cs typeface="Century Schoolbook" pitchFamily="34" charset="-120"/>
               </a:rPr>
-              <a:t>Isparljiva organska jedinjenja</a:t>
+              <a:t>Испарљива органска једињења</a:t>
             </a:r>
             <a:endParaRPr lang="en-US" sz="1300" dirty="0"/>
           </a:p>
@@ -5803,7 +5803,7 @@
                 <a:ea typeface="Calibri" pitchFamily="34" charset="-122"/>
                 <a:cs typeface="Calibri" pitchFamily="34" charset="-120"/>
               </a:rPr>
-              <a:t>Miris borove šume su terpeni; miris kiše — geosmin. Šume ih emituju više nego sav saobraćaj.</a:t>
+              <a:t>Мирис борове шуме су терпени; мирис кише — геосмин. Шуме их емитују више него сав саобраћај.</a:t>
             </a:r>
             <a:endParaRPr lang="en-US" sz="1200" dirty="0"/>
           </a:p>
@@ -5913,7 +5913,7 @@
                 <a:ea typeface="Century Schoolbook" pitchFamily="34" charset="-122"/>
                 <a:cs typeface="Century Schoolbook" pitchFamily="34" charset="-120"/>
               </a:rPr>
-              <a:t>Hidrosfera</a:t>
+              <a:t>Хидросфера</a:t>
             </a:r>
             <a:endParaRPr lang="en-US" sz="3000" dirty="0"/>
           </a:p>
@@ -5952,7 +5952,7 @@
                 <a:ea typeface="Calibri" pitchFamily="34" charset="-122"/>
                 <a:cs typeface="Calibri" pitchFamily="34" charset="-120"/>
               </a:rPr>
-              <a:t>Okean je najveći rezervoar organskih supstanci na planeti</a:t>
+              <a:t>Океан је највећи резервоар органских супстанци на планети</a:t>
             </a:r>
             <a:endParaRPr lang="en-US" sz="1300" dirty="0"/>
           </a:p>
@@ -6030,7 +6030,7 @@
                 <a:ea typeface="Calibri" pitchFamily="34" charset="-122"/>
                 <a:cs typeface="Calibri" pitchFamily="34" charset="-120"/>
               </a:rPr>
-              <a:t>milijardi tona rastvorenog organskog ugljenika u okeanima — koliko i sav CO₂ u atmosferi</a:t>
+              <a:t>милијарди тона раствореног органског угљеника у океанима — колико и сав CO₂ у атмосфери</a:t>
             </a:r>
             <a:endParaRPr lang="en-US" sz="1300" dirty="0"/>
           </a:p>
@@ -6092,7 +6092,7 @@
                 <a:ea typeface="Century Schoolbook" pitchFamily="34" charset="-122"/>
                 <a:cs typeface="Century Schoolbook" pitchFamily="34" charset="-120"/>
               </a:rPr>
-              <a:t>Rastvoreni organski ugljenik (DOC)</a:t>
+              <a:t>Растворени органски угљеник (DOC)</a:t>
             </a:r>
             <a:endParaRPr lang="en-US" sz="1250" dirty="0"/>
           </a:p>
@@ -6134,7 +6134,7 @@
                 <a:ea typeface="Calibri" pitchFamily="34" charset="-122"/>
                 <a:cs typeface="Calibri" pitchFamily="34" charset="-120"/>
               </a:rPr>
-              <a:t>Ostaci planktona, šećeri, aminokiseline, huminske supstance. Svaka čaša morske vode sadrži ih na milione molekula.</a:t>
+              <a:t>Остаци планктона, шећери, аминокиселине, хуминске супстанце. Свака чаша морске воде садржи их на милионе молекула.</a:t>
             </a:r>
             <a:endParaRPr lang="en-US" sz="1100" dirty="0"/>
           </a:p>
@@ -6196,7 +6196,7 @@
                 <a:ea typeface="Century Schoolbook" pitchFamily="34" charset="-122"/>
                 <a:cs typeface="Century Schoolbook" pitchFamily="34" charset="-120"/>
               </a:rPr>
-              <a:t>Huminske supstance</a:t>
+              <a:t>Хуминске супстанце</a:t>
             </a:r>
             <a:endParaRPr lang="en-US" sz="1250" dirty="0"/>
           </a:p>
@@ -6238,7 +6238,7 @@
                 <a:ea typeface="Calibri" pitchFamily="34" charset="-122"/>
                 <a:cs typeface="Calibri" pitchFamily="34" charset="-120"/>
               </a:rPr>
-              <a:t>Daju rekama i jezerima smeđu boju („crne reke“ poput Rio Negra). Nastaju raspadanjem lišća i treseta.</a:t>
+              <a:t>Дају рекама и језерима смеђу боју („црне реке“ попут Рио Негра). Настају распадањем лишћа и тресета.</a:t>
             </a:r>
             <a:endParaRPr lang="en-US" sz="1100" dirty="0"/>
           </a:p>
@@ -6300,7 +6300,7 @@
                 <a:ea typeface="Century Schoolbook" pitchFamily="34" charset="-122"/>
                 <a:cs typeface="Century Schoolbook" pitchFamily="34" charset="-120"/>
               </a:rPr>
-              <a:t>Ugljovodonici</a:t>
+              <a:t>Угљоводоници</a:t>
             </a:r>
             <a:endParaRPr lang="en-US" sz="1250" dirty="0"/>
           </a:p>
@@ -6342,7 +6342,7 @@
                 <a:ea typeface="Calibri" pitchFamily="34" charset="-122"/>
                 <a:cs typeface="Calibri" pitchFamily="34" charset="-120"/>
               </a:rPr>
-              <a:t>Nafta prirodno curi sa dna mora — oko polovine nafte u okeanu dolazi iz prirodnih izvora, ne od tankera.</a:t>
+              <a:t>Нафта природно цури са дна мора — око половине нафте у океану долази из природних извора, не од танкера.</a:t>
             </a:r>
             <a:endParaRPr lang="en-US" sz="1100" dirty="0"/>
           </a:p>
@@ -6452,7 +6452,7 @@
                 <a:ea typeface="Century Schoolbook" pitchFamily="34" charset="-122"/>
                 <a:cs typeface="Century Schoolbook" pitchFamily="34" charset="-120"/>
               </a:rPr>
-              <a:t>Zemljište: humus</a:t>
+              <a:t>Земљиште: хумус</a:t>
             </a:r>
             <a:endParaRPr lang="en-US" sz="3000" dirty="0"/>
           </a:p>
@@ -6491,7 +6491,7 @@
                 <a:ea typeface="Calibri" pitchFamily="34" charset="-122"/>
                 <a:cs typeface="Calibri" pitchFamily="34" charset="-120"/>
               </a:rPr>
-              <a:t>Najvažnija organska supstanca nežive prirode za život na kopnu</a:t>
+              <a:t>Најважнија органска супстанца неживе природе за живот на копну</a:t>
             </a:r>
             <a:endParaRPr lang="en-US" sz="1300" dirty="0"/>
           </a:p>
@@ -6546,7 +6546,7 @@
         <p:spPr>
           <a:xfrm>
             <a:off x="4663440" y="3794760"/>
-            <a:ext cx="4023360" cy="1005840"/>
+            <a:ext cx="4023360" cy="914400"/>
           </a:xfrm>
           <a:prstGeom prst="rect">
             <a:avLst/>
@@ -6565,7 +6565,7 @@
               <a:buNone/>
             </a:pPr>
             <a:r>
-              <a:rPr lang="en-US" sz="1200" dirty="0">
+              <a:rPr lang="en-US" sz="1150" dirty="0">
                 <a:solidFill>
                   <a:srgbClr val="2A2420"/>
                 </a:solidFill>
@@ -6573,9 +6573,9 @@
                 <a:ea typeface="Calibri" pitchFamily="34" charset="-122"/>
                 <a:cs typeface="Calibri" pitchFamily="34" charset="-120"/>
               </a:rPr>
-              <a:t>Humus čine huminske i fulvo kiseline — tamne, složene supstance nastale raspadanjem biljnih ostataka. Zadržava vodu i minerale i daje zemljištu crnu boju. Zemljišta sveta drže više ugljenika nego atmosfera i sve biljke zajedno.</a:t>
-            </a:r>
-            <a:endParaRPr lang="en-US" sz="1200" dirty="0"/>
+              <a:t>Хумус чине хуминске и фулво киселине — тамне супстанце настале распадањем биљних остатака. Задржава воду и минерале и даје тлу црну боју. Земљишта света држе више угљеника него атмосфера и све биљке заједно.</a:t>
+            </a:r>
+            <a:endParaRPr lang="en-US" sz="1150" dirty="0"/>
           </a:p>
         </p:txBody>
       </p:sp>
@@ -6683,7 +6683,7 @@
                 <a:ea typeface="Century Schoolbook" pitchFamily="34" charset="-122"/>
                 <a:cs typeface="Century Schoolbook" pitchFamily="34" charset="-120"/>
               </a:rPr>
-              <a:t>Fosilna goriva</a:t>
+              <a:t>Фосилна горива</a:t>
             </a:r>
             <a:endParaRPr lang="en-US" sz="3000" dirty="0"/>
           </a:p>
@@ -6722,7 +6722,7 @@
                 <a:ea typeface="Calibri" pitchFamily="34" charset="-122"/>
                 <a:cs typeface="Calibri" pitchFamily="34" charset="-120"/>
               </a:rPr>
-              <a:t>Organske supstance zarobljene u stenama milionima godina</a:t>
+              <a:t>Органске супстанце заробљене у стенама милионима година</a:t>
             </a:r>
             <a:endParaRPr lang="en-US" sz="1300" dirty="0"/>
           </a:p>
@@ -6785,7 +6785,7 @@
                 <a:ea typeface="Century Schoolbook" pitchFamily="34" charset="-122"/>
                 <a:cs typeface="Century Schoolbook" pitchFamily="34" charset="-120"/>
               </a:rPr>
-              <a:t>Kako nastaju</a:t>
+              <a:t>Како настају</a:t>
             </a:r>
             <a:endParaRPr lang="en-US" sz="1500" dirty="0"/>
           </a:p>
@@ -6820,7 +6820,7 @@
               <a:buChar char="–"/>
             </a:pPr>
             <a:r>
-              <a:rPr lang="en-US" sz="1200" dirty="0">
+              <a:rPr lang="en-US" sz="1150" dirty="0">
                 <a:solidFill>
                   <a:srgbClr val="2A2420"/>
                 </a:solidFill>
@@ -6828,9 +6828,9 @@
                 <a:ea typeface="Calibri" pitchFamily="34" charset="-122"/>
                 <a:cs typeface="Calibri" pitchFamily="34" charset="-120"/>
               </a:rPr>
-              <a:t>Biljke močvara → treset → lignit → kameni ugalj → antracit</a:t>
-            </a:r>
-            <a:endParaRPr lang="en-US" sz="1200" dirty="0"/>
+              <a:t>Биљке мочвара → тресет → лигнит → камени угаљ → антрацит</a:t>
+            </a:r>
+            <a:endParaRPr lang="en-US" sz="1150" dirty="0"/>
           </a:p>
           <a:p>
             <a:pPr marL="342900" indent="-342900">
@@ -6841,7 +6841,7 @@
               <a:buChar char="–"/>
             </a:pPr>
             <a:r>
-              <a:rPr lang="en-US" sz="1200" dirty="0">
+              <a:rPr lang="en-US" sz="1150" dirty="0">
                 <a:solidFill>
                   <a:srgbClr val="2A2420"/>
                 </a:solidFill>
@@ -6849,9 +6849,9 @@
                 <a:ea typeface="Calibri" pitchFamily="34" charset="-122"/>
                 <a:cs typeface="Calibri" pitchFamily="34" charset="-120"/>
               </a:rPr>
-              <a:t>Plankton na dnu mora → kerogen → nafta i prirodni gas</a:t>
-            </a:r>
-            <a:endParaRPr lang="en-US" sz="1200" dirty="0"/>
+              <a:t>Планктон на дну мора → кероген → нафта и природни гас</a:t>
+            </a:r>
+            <a:endParaRPr lang="en-US" sz="1150" dirty="0"/>
           </a:p>
           <a:p>
             <a:pPr marL="342900" indent="-342900">
@@ -6862,7 +6862,7 @@
               <a:buChar char="–"/>
             </a:pPr>
             <a:r>
-              <a:rPr lang="en-US" sz="1200" dirty="0">
+              <a:rPr lang="en-US" sz="1150" dirty="0">
                 <a:solidFill>
                   <a:srgbClr val="2A2420"/>
                 </a:solidFill>
@@ -6870,9 +6870,9 @@
                 <a:ea typeface="Calibri" pitchFamily="34" charset="-122"/>
                 <a:cs typeface="Calibri" pitchFamily="34" charset="-120"/>
               </a:rPr>
-              <a:t>Uslovi: bez kiseonika, visok pritisak, 60–150 °C, milioni godina</a:t>
-            </a:r>
-            <a:endParaRPr lang="en-US" sz="1200" dirty="0"/>
+              <a:t>Услови: без кисеоника, висок притисак, 60–150 °C, милиони година</a:t>
+            </a:r>
+            <a:endParaRPr lang="en-US" sz="1150" dirty="0"/>
           </a:p>
         </p:txBody>
       </p:sp>
@@ -6909,7 +6909,7 @@
                 <a:ea typeface="Century Schoolbook" pitchFamily="34" charset="-122"/>
                 <a:cs typeface="Century Schoolbook" pitchFamily="34" charset="-120"/>
               </a:rPr>
-              <a:t>Zanimljivo</a:t>
+              <a:t>Занимљиво</a:t>
             </a:r>
             <a:endParaRPr lang="en-US" sz="1500" dirty="0"/>
           </a:p>
@@ -6943,7 +6943,7 @@
               <a:buNone/>
             </a:pPr>
             <a:r>
-              <a:rPr lang="en-US" sz="1200" dirty="0">
+              <a:rPr lang="en-US" sz="1150" dirty="0">
                 <a:solidFill>
                   <a:srgbClr val="7A6E64"/>
                 </a:solidFill>
@@ -6951,9 +6951,9 @@
                 <a:ea typeface="Calibri" pitchFamily="34" charset="-122"/>
                 <a:cs typeface="Calibri" pitchFamily="34" charset="-120"/>
               </a:rPr>
-              <a:t>Nafta je smeša od preko 10 000 različitih ugljovodonika. Najstariji ugalj u Srbiji (Rtanj, Vrška Čuka) star je oko 300 miliona godina.</a:t>
-            </a:r>
-            <a:endParaRPr lang="en-US" sz="1200" dirty="0"/>
+              <a:t>Нафта је смеша од преко 10 000 угљоводоника. Најстарији угаљ у Србији (Ртањ) стар је око 300 милиона година.</a:t>
+            </a:r>
+            <a:endParaRPr lang="en-US" sz="1150" dirty="0"/>
           </a:p>
         </p:txBody>
       </p:sp>
@@ -7061,7 +7061,7 @@
                 <a:ea typeface="Century Schoolbook" pitchFamily="34" charset="-122"/>
                 <a:cs typeface="Century Schoolbook" pitchFamily="34" charset="-120"/>
               </a:rPr>
-              <a:t>Minerali organskog porekla</a:t>
+              <a:t>Минерали органског порекла</a:t>
             </a:r>
             <a:endParaRPr lang="en-US" sz="3000" dirty="0"/>
           </a:p>
@@ -7100,7 +7100,7 @@
                 <a:ea typeface="Calibri" pitchFamily="34" charset="-122"/>
                 <a:cs typeface="Calibri" pitchFamily="34" charset="-120"/>
               </a:rPr>
-              <a:t>Kada organska supstanca postane „kamen“</a:t>
+              <a:t>Када органска супстанца постане „камен“</a:t>
             </a:r>
             <a:endParaRPr lang="en-US" sz="1300" dirty="0"/>
           </a:p>
@@ -7163,7 +7163,7 @@
                 <a:ea typeface="Calibri" pitchFamily="34" charset="-122"/>
                 <a:cs typeface="Calibri" pitchFamily="34" charset="-120"/>
               </a:rPr>
-              <a:t>Ćilibar — fosilna smola četinara, stara 30–90 miliona godina</a:t>
+              <a:t>Ћилибар — фосилна смола четинара, стара 30–90 милиона година</a:t>
             </a:r>
             <a:endParaRPr lang="en-US" sz="1100" dirty="0"/>
           </a:p>
@@ -7202,7 +7202,7 @@
                 <a:ea typeface="Century Schoolbook" pitchFamily="34" charset="-122"/>
                 <a:cs typeface="Century Schoolbook" pitchFamily="34" charset="-120"/>
               </a:rPr>
-              <a:t>Ćilibar</a:t>
+              <a:t>Ћилибар</a:t>
             </a:r>
             <a:endParaRPr lang="en-US" sz="1500" dirty="0"/>
           </a:p>
@@ -7241,7 +7241,7 @@
                 <a:ea typeface="Calibri" pitchFamily="34" charset="-122"/>
                 <a:cs typeface="Calibri" pitchFamily="34" charset="-120"/>
               </a:rPr>
-              <a:t>očvrsla smola drveća; u njemu su sačuvani insekti i biljke</a:t>
+              <a:t>очврсла смола дрвећа; у њему су сачувани инсекти и биљке</a:t>
             </a:r>
             <a:endParaRPr lang="en-US" sz="1200" dirty="0"/>
           </a:p>
@@ -7280,7 +7280,7 @@
                 <a:ea typeface="Century Schoolbook" pitchFamily="34" charset="-122"/>
                 <a:cs typeface="Century Schoolbook" pitchFamily="34" charset="-120"/>
               </a:rPr>
-              <a:t>Bitumen i asfalt</a:t>
+              <a:t>Битумен и асфалт</a:t>
             </a:r>
             <a:endParaRPr lang="en-US" sz="1500" dirty="0"/>
           </a:p>
@@ -7319,7 +7319,7 @@
                 <a:ea typeface="Calibri" pitchFamily="34" charset="-122"/>
                 <a:cs typeface="Calibri" pitchFamily="34" charset="-120"/>
               </a:rPr>
-              <a:t>prirodne smeše teških ugljovodonika (jezero Pič, Trinidad)</a:t>
+              <a:t>природне смеше тешких угљоводоника (језеро Пич, Тринидад)</a:t>
             </a:r>
             <a:endParaRPr lang="en-US" sz="1200" dirty="0"/>
           </a:p>
@@ -7358,7 +7358,7 @@
                 <a:ea typeface="Century Schoolbook" pitchFamily="34" charset="-122"/>
                 <a:cs typeface="Century Schoolbook" pitchFamily="34" charset="-120"/>
               </a:rPr>
-              <a:t>Ozokerit</a:t>
+              <a:t>Озокерит</a:t>
             </a:r>
             <a:endParaRPr lang="en-US" sz="1500" dirty="0"/>
           </a:p>
@@ -7397,7 +7397,7 @@
                 <a:ea typeface="Calibri" pitchFamily="34" charset="-122"/>
                 <a:cs typeface="Calibri" pitchFamily="34" charset="-120"/>
               </a:rPr>
-              <a:t>„zemni vosak“ — prirodni parafin iz naftonosnih stena</a:t>
+              <a:t>„земни восак“ — природни парафин из нафтоносних стена</a:t>
             </a:r>
             <a:endParaRPr lang="en-US" sz="1200" dirty="0"/>
           </a:p>
@@ -7436,7 +7436,7 @@
                 <a:ea typeface="Century Schoolbook" pitchFamily="34" charset="-122"/>
                 <a:cs typeface="Century Schoolbook" pitchFamily="34" charset="-120"/>
               </a:rPr>
-              <a:t>Gagat</a:t>
+              <a:t>Гагат</a:t>
             </a:r>
             <a:endParaRPr lang="en-US" sz="1500" dirty="0"/>
           </a:p>
@@ -7475,7 +7475,7 @@
                 <a:ea typeface="Calibri" pitchFamily="34" charset="-122"/>
                 <a:cs typeface="Calibri" pitchFamily="34" charset="-120"/>
               </a:rPr>
-              <a:t>crni, sjajni fosilizovani drvo-ugalj, koristi se za nakit</a:t>
+              <a:t>црни, сјајни фосилизовани дрво-угаљ, користи се за накит</a:t>
             </a:r>
             <a:endParaRPr lang="en-US" sz="1200" dirty="0"/>
           </a:p>
